--- a/十字架的愛.pptx
+++ b/十字架的愛.pptx
@@ -5,9 +5,13 @@
     <p:sldMasterId id="2147483672" r:id="rId1"/>
   </p:sldMasterIdLst>
   <p:sldIdLst>
-    <p:sldId id="257" r:id="rId2"/>
-    <p:sldId id="258" r:id="rId3"/>
-    <p:sldId id="259" r:id="rId4"/>
+    <p:sldId id="391" r:id="rId2"/>
+    <p:sldId id="392" r:id="rId3"/>
+    <p:sldId id="610" r:id="rId4"/>
+    <p:sldId id="611" r:id="rId5"/>
+    <p:sldId id="612" r:id="rId6"/>
+    <p:sldId id="613" r:id="rId7"/>
+    <p:sldId id="614" r:id="rId8"/>
   </p:sldIdLst>
   <p:sldSz cx="12192000" cy="6858000"/>
   <p:notesSz cx="6858000" cy="9144000"/>
@@ -163,7 +167,7 @@
           <a:lstStyle/>
           <a:p>
             <a:r>
-              <a:rPr lang="en-US" altLang="zh-TW" smtClean="0"/>
+              <a:rPr lang="en-US" altLang="zh-TW"/>
               <a:t>Click to edit Master title style</a:t>
             </a:r>
             <a:endParaRPr lang="zh-TW" altLang="en-US"/>
@@ -282,7 +286,7 @@
           </a:lstStyle>
           <a:p>
             <a:r>
-              <a:rPr lang="en-US" altLang="zh-TW" smtClean="0"/>
+              <a:rPr lang="en-US" altLang="zh-TW"/>
               <a:t>Click to edit Master subtitle style</a:t>
             </a:r>
             <a:endParaRPr lang="zh-TW" altLang="en-US"/>
@@ -306,7 +310,7 @@
           <a:p>
             <a:fld id="{96019A61-05E4-4BF0-A811-D88305979371}" type="datetimeFigureOut">
               <a:rPr lang="zh-TW" altLang="en-US" smtClean="0"/>
-              <a:t>2020/3/7</a:t>
+              <a:t>2025/3/7</a:t>
             </a:fld>
             <a:endParaRPr lang="zh-TW" altLang="en-US"/>
           </a:p>
@@ -400,7 +404,7 @@
           <a:lstStyle/>
           <a:p>
             <a:r>
-              <a:rPr lang="en-US" altLang="zh-TW" smtClean="0"/>
+              <a:rPr lang="en-US" altLang="zh-TW"/>
               <a:t>Click to edit Master title style</a:t>
             </a:r>
             <a:endParaRPr lang="zh-TW" altLang="en-US"/>
@@ -424,35 +428,35 @@
           <a:p>
             <a:pPr lvl="0"/>
             <a:r>
-              <a:rPr lang="en-US" altLang="zh-TW" smtClean="0"/>
+              <a:rPr lang="en-US" altLang="zh-TW"/>
               <a:t>Edit Master text styles</a:t>
             </a:r>
           </a:p>
           <a:p>
             <a:pPr lvl="1"/>
             <a:r>
-              <a:rPr lang="en-US" altLang="zh-TW" smtClean="0"/>
+              <a:rPr lang="en-US" altLang="zh-TW"/>
               <a:t>Second level</a:t>
             </a:r>
           </a:p>
           <a:p>
             <a:pPr lvl="2"/>
             <a:r>
-              <a:rPr lang="en-US" altLang="zh-TW" smtClean="0"/>
+              <a:rPr lang="en-US" altLang="zh-TW"/>
               <a:t>Third level</a:t>
             </a:r>
           </a:p>
           <a:p>
             <a:pPr lvl="3"/>
             <a:r>
-              <a:rPr lang="en-US" altLang="zh-TW" smtClean="0"/>
+              <a:rPr lang="en-US" altLang="zh-TW"/>
               <a:t>Fourth level</a:t>
             </a:r>
           </a:p>
           <a:p>
             <a:pPr lvl="4"/>
             <a:r>
-              <a:rPr lang="en-US" altLang="zh-TW" smtClean="0"/>
+              <a:rPr lang="en-US" altLang="zh-TW"/>
               <a:t>Fifth level</a:t>
             </a:r>
             <a:endParaRPr lang="zh-TW" altLang="en-US"/>
@@ -476,7 +480,7 @@
           <a:p>
             <a:fld id="{96019A61-05E4-4BF0-A811-D88305979371}" type="datetimeFigureOut">
               <a:rPr lang="zh-TW" altLang="en-US" smtClean="0"/>
-              <a:t>2020/3/7</a:t>
+              <a:t>2025/3/7</a:t>
             </a:fld>
             <a:endParaRPr lang="zh-TW" altLang="en-US"/>
           </a:p>
@@ -575,7 +579,7 @@
           <a:lstStyle/>
           <a:p>
             <a:r>
-              <a:rPr lang="en-US" altLang="zh-TW" smtClean="0"/>
+              <a:rPr lang="en-US" altLang="zh-TW"/>
               <a:t>Click to edit Master title style</a:t>
             </a:r>
             <a:endParaRPr lang="zh-TW" altLang="en-US"/>
@@ -604,35 +608,35 @@
           <a:p>
             <a:pPr lvl="0"/>
             <a:r>
-              <a:rPr lang="en-US" altLang="zh-TW" smtClean="0"/>
+              <a:rPr lang="en-US" altLang="zh-TW"/>
               <a:t>Edit Master text styles</a:t>
             </a:r>
           </a:p>
           <a:p>
             <a:pPr lvl="1"/>
             <a:r>
-              <a:rPr lang="en-US" altLang="zh-TW" smtClean="0"/>
+              <a:rPr lang="en-US" altLang="zh-TW"/>
               <a:t>Second level</a:t>
             </a:r>
           </a:p>
           <a:p>
             <a:pPr lvl="2"/>
             <a:r>
-              <a:rPr lang="en-US" altLang="zh-TW" smtClean="0"/>
+              <a:rPr lang="en-US" altLang="zh-TW"/>
               <a:t>Third level</a:t>
             </a:r>
           </a:p>
           <a:p>
             <a:pPr lvl="3"/>
             <a:r>
-              <a:rPr lang="en-US" altLang="zh-TW" smtClean="0"/>
+              <a:rPr lang="en-US" altLang="zh-TW"/>
               <a:t>Fourth level</a:t>
             </a:r>
           </a:p>
           <a:p>
             <a:pPr lvl="4"/>
             <a:r>
-              <a:rPr lang="en-US" altLang="zh-TW" smtClean="0"/>
+              <a:rPr lang="en-US" altLang="zh-TW"/>
               <a:t>Fifth level</a:t>
             </a:r>
             <a:endParaRPr lang="zh-TW" altLang="en-US"/>
@@ -656,7 +660,7 @@
           <a:p>
             <a:fld id="{96019A61-05E4-4BF0-A811-D88305979371}" type="datetimeFigureOut">
               <a:rPr lang="zh-TW" altLang="en-US" smtClean="0"/>
-              <a:t>2020/3/7</a:t>
+              <a:t>2025/3/7</a:t>
             </a:fld>
             <a:endParaRPr lang="zh-TW" altLang="en-US"/>
           </a:p>
@@ -750,7 +754,7 @@
           <a:lstStyle/>
           <a:p>
             <a:r>
-              <a:rPr lang="en-US" altLang="zh-TW" smtClean="0"/>
+              <a:rPr lang="en-US" altLang="zh-TW"/>
               <a:t>Click to edit Master title style</a:t>
             </a:r>
             <a:endParaRPr lang="zh-TW" altLang="en-US"/>
@@ -774,35 +778,35 @@
           <a:p>
             <a:pPr lvl="0"/>
             <a:r>
-              <a:rPr lang="en-US" altLang="zh-TW" smtClean="0"/>
+              <a:rPr lang="en-US" altLang="zh-TW"/>
               <a:t>Edit Master text styles</a:t>
             </a:r>
           </a:p>
           <a:p>
             <a:pPr lvl="1"/>
             <a:r>
-              <a:rPr lang="en-US" altLang="zh-TW" smtClean="0"/>
+              <a:rPr lang="en-US" altLang="zh-TW"/>
               <a:t>Second level</a:t>
             </a:r>
           </a:p>
           <a:p>
             <a:pPr lvl="2"/>
             <a:r>
-              <a:rPr lang="en-US" altLang="zh-TW" smtClean="0"/>
+              <a:rPr lang="en-US" altLang="zh-TW"/>
               <a:t>Third level</a:t>
             </a:r>
           </a:p>
           <a:p>
             <a:pPr lvl="3"/>
             <a:r>
-              <a:rPr lang="en-US" altLang="zh-TW" smtClean="0"/>
+              <a:rPr lang="en-US" altLang="zh-TW"/>
               <a:t>Fourth level</a:t>
             </a:r>
           </a:p>
           <a:p>
             <a:pPr lvl="4"/>
             <a:r>
-              <a:rPr lang="en-US" altLang="zh-TW" smtClean="0"/>
+              <a:rPr lang="en-US" altLang="zh-TW"/>
               <a:t>Fifth level</a:t>
             </a:r>
             <a:endParaRPr lang="zh-TW" altLang="en-US"/>
@@ -826,7 +830,7 @@
           <a:p>
             <a:fld id="{96019A61-05E4-4BF0-A811-D88305979371}" type="datetimeFigureOut">
               <a:rPr lang="zh-TW" altLang="en-US" smtClean="0"/>
-              <a:t>2020/3/7</a:t>
+              <a:t>2025/3/7</a:t>
             </a:fld>
             <a:endParaRPr lang="zh-TW" altLang="en-US"/>
           </a:p>
@@ -929,7 +933,7 @@
           </a:lstStyle>
           <a:p>
             <a:r>
-              <a:rPr lang="en-US" altLang="zh-TW" smtClean="0"/>
+              <a:rPr lang="en-US" altLang="zh-TW"/>
               <a:t>Click to edit Master title style</a:t>
             </a:r>
             <a:endParaRPr lang="zh-TW" altLang="en-US"/>
@@ -1049,7 +1053,7 @@
           <a:p>
             <a:pPr lvl="0"/>
             <a:r>
-              <a:rPr lang="en-US" altLang="zh-TW" smtClean="0"/>
+              <a:rPr lang="en-US" altLang="zh-TW"/>
               <a:t>Edit Master text styles</a:t>
             </a:r>
           </a:p>
@@ -1072,7 +1076,7 @@
           <a:p>
             <a:fld id="{96019A61-05E4-4BF0-A811-D88305979371}" type="datetimeFigureOut">
               <a:rPr lang="zh-TW" altLang="en-US" smtClean="0"/>
-              <a:t>2020/3/7</a:t>
+              <a:t>2025/3/7</a:t>
             </a:fld>
             <a:endParaRPr lang="zh-TW" altLang="en-US"/>
           </a:p>
@@ -1166,7 +1170,7 @@
           <a:lstStyle/>
           <a:p>
             <a:r>
-              <a:rPr lang="en-US" altLang="zh-TW" smtClean="0"/>
+              <a:rPr lang="en-US" altLang="zh-TW"/>
               <a:t>Click to edit Master title style</a:t>
             </a:r>
             <a:endParaRPr lang="zh-TW" altLang="en-US"/>
@@ -1223,35 +1227,35 @@
           <a:p>
             <a:pPr lvl="0"/>
             <a:r>
-              <a:rPr lang="en-US" altLang="zh-TW" smtClean="0"/>
+              <a:rPr lang="en-US" altLang="zh-TW"/>
               <a:t>Edit Master text styles</a:t>
             </a:r>
           </a:p>
           <a:p>
             <a:pPr lvl="1"/>
             <a:r>
-              <a:rPr lang="en-US" altLang="zh-TW" smtClean="0"/>
+              <a:rPr lang="en-US" altLang="zh-TW"/>
               <a:t>Second level</a:t>
             </a:r>
           </a:p>
           <a:p>
             <a:pPr lvl="2"/>
             <a:r>
-              <a:rPr lang="en-US" altLang="zh-TW" smtClean="0"/>
+              <a:rPr lang="en-US" altLang="zh-TW"/>
               <a:t>Third level</a:t>
             </a:r>
           </a:p>
           <a:p>
             <a:pPr lvl="3"/>
             <a:r>
-              <a:rPr lang="en-US" altLang="zh-TW" smtClean="0"/>
+              <a:rPr lang="en-US" altLang="zh-TW"/>
               <a:t>Fourth level</a:t>
             </a:r>
           </a:p>
           <a:p>
             <a:pPr lvl="4"/>
             <a:r>
-              <a:rPr lang="en-US" altLang="zh-TW" smtClean="0"/>
+              <a:rPr lang="en-US" altLang="zh-TW"/>
               <a:t>Fifth level</a:t>
             </a:r>
             <a:endParaRPr lang="zh-TW" altLang="en-US"/>
@@ -1308,35 +1312,35 @@
           <a:p>
             <a:pPr lvl="0"/>
             <a:r>
-              <a:rPr lang="en-US" altLang="zh-TW" smtClean="0"/>
+              <a:rPr lang="en-US" altLang="zh-TW"/>
               <a:t>Edit Master text styles</a:t>
             </a:r>
           </a:p>
           <a:p>
             <a:pPr lvl="1"/>
             <a:r>
-              <a:rPr lang="en-US" altLang="zh-TW" smtClean="0"/>
+              <a:rPr lang="en-US" altLang="zh-TW"/>
               <a:t>Second level</a:t>
             </a:r>
           </a:p>
           <a:p>
             <a:pPr lvl="2"/>
             <a:r>
-              <a:rPr lang="en-US" altLang="zh-TW" smtClean="0"/>
+              <a:rPr lang="en-US" altLang="zh-TW"/>
               <a:t>Third level</a:t>
             </a:r>
           </a:p>
           <a:p>
             <a:pPr lvl="3"/>
             <a:r>
-              <a:rPr lang="en-US" altLang="zh-TW" smtClean="0"/>
+              <a:rPr lang="en-US" altLang="zh-TW"/>
               <a:t>Fourth level</a:t>
             </a:r>
           </a:p>
           <a:p>
             <a:pPr lvl="4"/>
             <a:r>
-              <a:rPr lang="en-US" altLang="zh-TW" smtClean="0"/>
+              <a:rPr lang="en-US" altLang="zh-TW"/>
               <a:t>Fifth level</a:t>
             </a:r>
             <a:endParaRPr lang="zh-TW" altLang="en-US"/>
@@ -1360,7 +1364,7 @@
           <a:p>
             <a:fld id="{96019A61-05E4-4BF0-A811-D88305979371}" type="datetimeFigureOut">
               <a:rPr lang="zh-TW" altLang="en-US" smtClean="0"/>
-              <a:t>2020/3/7</a:t>
+              <a:t>2025/3/7</a:t>
             </a:fld>
             <a:endParaRPr lang="zh-TW" altLang="en-US"/>
           </a:p>
@@ -1458,7 +1462,7 @@
           </a:lstStyle>
           <a:p>
             <a:r>
-              <a:rPr lang="en-US" altLang="zh-TW" smtClean="0"/>
+              <a:rPr lang="en-US" altLang="zh-TW"/>
               <a:t>Click to edit Master title style</a:t>
             </a:r>
             <a:endParaRPr lang="zh-TW" altLang="en-US"/>
@@ -1524,7 +1528,7 @@
           <a:p>
             <a:pPr lvl="0"/>
             <a:r>
-              <a:rPr lang="en-US" altLang="zh-TW" smtClean="0"/>
+              <a:rPr lang="en-US" altLang="zh-TW"/>
               <a:t>Edit Master text styles</a:t>
             </a:r>
           </a:p>
@@ -1580,35 +1584,35 @@
           <a:p>
             <a:pPr lvl="0"/>
             <a:r>
-              <a:rPr lang="en-US" altLang="zh-TW" smtClean="0"/>
+              <a:rPr lang="en-US" altLang="zh-TW"/>
               <a:t>Edit Master text styles</a:t>
             </a:r>
           </a:p>
           <a:p>
             <a:pPr lvl="1"/>
             <a:r>
-              <a:rPr lang="en-US" altLang="zh-TW" smtClean="0"/>
+              <a:rPr lang="en-US" altLang="zh-TW"/>
               <a:t>Second level</a:t>
             </a:r>
           </a:p>
           <a:p>
             <a:pPr lvl="2"/>
             <a:r>
-              <a:rPr lang="en-US" altLang="zh-TW" smtClean="0"/>
+              <a:rPr lang="en-US" altLang="zh-TW"/>
               <a:t>Third level</a:t>
             </a:r>
           </a:p>
           <a:p>
             <a:pPr lvl="3"/>
             <a:r>
-              <a:rPr lang="en-US" altLang="zh-TW" smtClean="0"/>
+              <a:rPr lang="en-US" altLang="zh-TW"/>
               <a:t>Fourth level</a:t>
             </a:r>
           </a:p>
           <a:p>
             <a:pPr lvl="4"/>
             <a:r>
-              <a:rPr lang="en-US" altLang="zh-TW" smtClean="0"/>
+              <a:rPr lang="en-US" altLang="zh-TW"/>
               <a:t>Fifth level</a:t>
             </a:r>
             <a:endParaRPr lang="zh-TW" altLang="en-US"/>
@@ -1674,7 +1678,7 @@
           <a:p>
             <a:pPr lvl="0"/>
             <a:r>
-              <a:rPr lang="en-US" altLang="zh-TW" smtClean="0"/>
+              <a:rPr lang="en-US" altLang="zh-TW"/>
               <a:t>Edit Master text styles</a:t>
             </a:r>
           </a:p>
@@ -1730,35 +1734,35 @@
           <a:p>
             <a:pPr lvl="0"/>
             <a:r>
-              <a:rPr lang="en-US" altLang="zh-TW" smtClean="0"/>
+              <a:rPr lang="en-US" altLang="zh-TW"/>
               <a:t>Edit Master text styles</a:t>
             </a:r>
           </a:p>
           <a:p>
             <a:pPr lvl="1"/>
             <a:r>
-              <a:rPr lang="en-US" altLang="zh-TW" smtClean="0"/>
+              <a:rPr lang="en-US" altLang="zh-TW"/>
               <a:t>Second level</a:t>
             </a:r>
           </a:p>
           <a:p>
             <a:pPr lvl="2"/>
             <a:r>
-              <a:rPr lang="en-US" altLang="zh-TW" smtClean="0"/>
+              <a:rPr lang="en-US" altLang="zh-TW"/>
               <a:t>Third level</a:t>
             </a:r>
           </a:p>
           <a:p>
             <a:pPr lvl="3"/>
             <a:r>
-              <a:rPr lang="en-US" altLang="zh-TW" smtClean="0"/>
+              <a:rPr lang="en-US" altLang="zh-TW"/>
               <a:t>Fourth level</a:t>
             </a:r>
           </a:p>
           <a:p>
             <a:pPr lvl="4"/>
             <a:r>
-              <a:rPr lang="en-US" altLang="zh-TW" smtClean="0"/>
+              <a:rPr lang="en-US" altLang="zh-TW"/>
               <a:t>Fifth level</a:t>
             </a:r>
             <a:endParaRPr lang="zh-TW" altLang="en-US"/>
@@ -1782,7 +1786,7 @@
           <a:p>
             <a:fld id="{96019A61-05E4-4BF0-A811-D88305979371}" type="datetimeFigureOut">
               <a:rPr lang="zh-TW" altLang="en-US" smtClean="0"/>
-              <a:t>2020/3/7</a:t>
+              <a:t>2025/3/7</a:t>
             </a:fld>
             <a:endParaRPr lang="zh-TW" altLang="en-US"/>
           </a:p>
@@ -1876,7 +1880,7 @@
           <a:lstStyle/>
           <a:p>
             <a:r>
-              <a:rPr lang="en-US" altLang="zh-TW" smtClean="0"/>
+              <a:rPr lang="en-US" altLang="zh-TW"/>
               <a:t>Click to edit Master title style</a:t>
             </a:r>
             <a:endParaRPr lang="zh-TW" altLang="en-US"/>
@@ -1900,7 +1904,7 @@
           <a:p>
             <a:fld id="{96019A61-05E4-4BF0-A811-D88305979371}" type="datetimeFigureOut">
               <a:rPr lang="zh-TW" altLang="en-US" smtClean="0"/>
-              <a:t>2020/3/7</a:t>
+              <a:t>2025/3/7</a:t>
             </a:fld>
             <a:endParaRPr lang="zh-TW" altLang="en-US"/>
           </a:p>
@@ -1995,7 +1999,7 @@
           <a:p>
             <a:fld id="{96019A61-05E4-4BF0-A811-D88305979371}" type="datetimeFigureOut">
               <a:rPr lang="zh-TW" altLang="en-US" smtClean="0"/>
-              <a:t>2020/3/7</a:t>
+              <a:t>2025/3/7</a:t>
             </a:fld>
             <a:endParaRPr lang="zh-TW" altLang="en-US"/>
           </a:p>
@@ -2098,7 +2102,7 @@
           </a:lstStyle>
           <a:p>
             <a:r>
-              <a:rPr lang="en-US" altLang="zh-TW" smtClean="0"/>
+              <a:rPr lang="en-US" altLang="zh-TW"/>
               <a:t>Click to edit Master title style</a:t>
             </a:r>
             <a:endParaRPr lang="zh-TW" altLang="en-US"/>
@@ -2155,35 +2159,35 @@
           <a:p>
             <a:pPr lvl="0"/>
             <a:r>
-              <a:rPr lang="en-US" altLang="zh-TW" smtClean="0"/>
+              <a:rPr lang="en-US" altLang="zh-TW"/>
               <a:t>Edit Master text styles</a:t>
             </a:r>
           </a:p>
           <a:p>
             <a:pPr lvl="1"/>
             <a:r>
-              <a:rPr lang="en-US" altLang="zh-TW" smtClean="0"/>
+              <a:rPr lang="en-US" altLang="zh-TW"/>
               <a:t>Second level</a:t>
             </a:r>
           </a:p>
           <a:p>
             <a:pPr lvl="2"/>
             <a:r>
-              <a:rPr lang="en-US" altLang="zh-TW" smtClean="0"/>
+              <a:rPr lang="en-US" altLang="zh-TW"/>
               <a:t>Third level</a:t>
             </a:r>
           </a:p>
           <a:p>
             <a:pPr lvl="3"/>
             <a:r>
-              <a:rPr lang="en-US" altLang="zh-TW" smtClean="0"/>
+              <a:rPr lang="en-US" altLang="zh-TW"/>
               <a:t>Fourth level</a:t>
             </a:r>
           </a:p>
           <a:p>
             <a:pPr lvl="4"/>
             <a:r>
-              <a:rPr lang="en-US" altLang="zh-TW" smtClean="0"/>
+              <a:rPr lang="en-US" altLang="zh-TW"/>
               <a:t>Fifth level</a:t>
             </a:r>
             <a:endParaRPr lang="zh-TW" altLang="en-US"/>
@@ -2249,7 +2253,7 @@
           <a:p>
             <a:pPr lvl="0"/>
             <a:r>
-              <a:rPr lang="en-US" altLang="zh-TW" smtClean="0"/>
+              <a:rPr lang="en-US" altLang="zh-TW"/>
               <a:t>Edit Master text styles</a:t>
             </a:r>
           </a:p>
@@ -2272,7 +2276,7 @@
           <a:p>
             <a:fld id="{96019A61-05E4-4BF0-A811-D88305979371}" type="datetimeFigureOut">
               <a:rPr lang="zh-TW" altLang="en-US" smtClean="0"/>
-              <a:t>2020/3/7</a:t>
+              <a:t>2025/3/7</a:t>
             </a:fld>
             <a:endParaRPr lang="zh-TW" altLang="en-US"/>
           </a:p>
@@ -2375,7 +2379,7 @@
           </a:lstStyle>
           <a:p>
             <a:r>
-              <a:rPr lang="en-US" altLang="zh-TW" smtClean="0"/>
+              <a:rPr lang="en-US" altLang="zh-TW"/>
               <a:t>Click to edit Master title style</a:t>
             </a:r>
             <a:endParaRPr lang="zh-TW" altLang="en-US"/>
@@ -2440,7 +2444,7 @@
           </a:lstStyle>
           <a:p>
             <a:r>
-              <a:rPr lang="en-US" altLang="zh-TW" smtClean="0"/>
+              <a:rPr lang="en-US" altLang="zh-TW"/>
               <a:t>Click icon to add picture</a:t>
             </a:r>
             <a:endParaRPr lang="zh-TW" altLang="en-US"/>
@@ -2506,7 +2510,7 @@
           <a:p>
             <a:pPr lvl="0"/>
             <a:r>
-              <a:rPr lang="en-US" altLang="zh-TW" smtClean="0"/>
+              <a:rPr lang="en-US" altLang="zh-TW"/>
               <a:t>Edit Master text styles</a:t>
             </a:r>
           </a:p>
@@ -2529,7 +2533,7 @@
           <a:p>
             <a:fld id="{96019A61-05E4-4BF0-A811-D88305979371}" type="datetimeFigureOut">
               <a:rPr lang="zh-TW" altLang="en-US" smtClean="0"/>
-              <a:t>2020/3/7</a:t>
+              <a:t>2025/3/7</a:t>
             </a:fld>
             <a:endParaRPr lang="zh-TW" altLang="en-US"/>
           </a:p>
@@ -2643,10 +2647,9 @@
           <a:lstStyle/>
           <a:p>
             <a:r>
-              <a:rPr lang="zh-TW" altLang="en-US" smtClean="0"/>
+              <a:rPr lang="zh-TW" altLang="en-US"/>
               <a:t>按一下以編輯母片標題樣式</a:t>
             </a:r>
-            <a:endParaRPr lang="zh-TW" altLang="en-US"/>
           </a:p>
         </p:txBody>
       </p:sp>
@@ -2677,38 +2680,37 @@
           <a:p>
             <a:pPr lvl="0"/>
             <a:r>
-              <a:rPr lang="zh-TW" altLang="en-US" smtClean="0"/>
+              <a:rPr lang="zh-TW" altLang="en-US"/>
               <a:t>按一下以編輯母片文字樣式</a:t>
             </a:r>
           </a:p>
           <a:p>
             <a:pPr lvl="1"/>
             <a:r>
-              <a:rPr lang="zh-TW" altLang="en-US" smtClean="0"/>
+              <a:rPr lang="zh-TW" altLang="en-US"/>
               <a:t>第二層</a:t>
             </a:r>
           </a:p>
           <a:p>
             <a:pPr lvl="2"/>
             <a:r>
-              <a:rPr lang="zh-TW" altLang="en-US" smtClean="0"/>
+              <a:rPr lang="zh-TW" altLang="en-US"/>
               <a:t>第三層</a:t>
             </a:r>
           </a:p>
           <a:p>
             <a:pPr lvl="3"/>
             <a:r>
-              <a:rPr lang="zh-TW" altLang="en-US" smtClean="0"/>
+              <a:rPr lang="zh-TW" altLang="en-US"/>
               <a:t>第四層</a:t>
             </a:r>
           </a:p>
           <a:p>
             <a:pPr lvl="4"/>
             <a:r>
-              <a:rPr lang="zh-TW" altLang="en-US" smtClean="0"/>
+              <a:rPr lang="zh-TW" altLang="en-US"/>
               <a:t>第五層</a:t>
             </a:r>
-            <a:endParaRPr lang="zh-TW" altLang="en-US"/>
           </a:p>
         </p:txBody>
       </p:sp>
@@ -2747,7 +2749,7 @@
           <a:p>
             <a:fld id="{96019A61-05E4-4BF0-A811-D88305979371}" type="datetimeFigureOut">
               <a:rPr lang="zh-TW" altLang="en-US" smtClean="0"/>
-              <a:t>2020/3/7</a:t>
+              <a:t>2025/3/7</a:t>
             </a:fld>
             <a:endParaRPr lang="zh-TW" altLang="en-US"/>
           </a:p>
@@ -3110,7 +3112,13 @@
   <p:cSld>
     <p:spTree>
       <p:nvGrpSpPr>
-        <p:cNvPr id="1" name=""/>
+        <p:cNvPr id="1" name="">
+          <a:extLst>
+            <a:ext uri="{FF2B5EF4-FFF2-40B4-BE49-F238E27FC236}">
+              <a16:creationId xmlns:a16="http://schemas.microsoft.com/office/drawing/2014/main" id="{5F20F3D7-EDDF-CE30-9060-314A88E3730B}"/>
+            </a:ext>
+          </a:extLst>
+        </p:cNvPr>
         <p:cNvGrpSpPr/>
         <p:nvPr/>
       </p:nvGrpSpPr>
@@ -3124,7 +3132,13 @@
       </p:grpSpPr>
       <p:sp>
         <p:nvSpPr>
-          <p:cNvPr id="3" name="標題 2"/>
+          <p:cNvPr id="4" name="標題 3">
+            <a:extLst>
+              <a:ext uri="{FF2B5EF4-FFF2-40B4-BE49-F238E27FC236}">
+                <a16:creationId xmlns:a16="http://schemas.microsoft.com/office/drawing/2014/main" id="{CD6A41DD-B5E6-D530-EC0F-85726817D119}"/>
+              </a:ext>
+            </a:extLst>
+          </p:cNvPr>
           <p:cNvSpPr>
             <a:spLocks noGrp="1"/>
           </p:cNvSpPr>
@@ -3132,142 +3146,48 @@
             <p:ph type="title"/>
           </p:nvPr>
         </p:nvSpPr>
-        <p:spPr/>
-        <p:txBody>
-          <a:bodyPr/>
-          <a:lstStyle/>
-          <a:p>
-            <a:r>
-              <a:rPr lang="zh-TW" altLang="en-US" b="1" dirty="0">
-                <a:latin typeface="Microsoft JhengHei" panose="020B0604030504040204" pitchFamily="34" charset="-120"/>
-                <a:ea typeface="Microsoft JhengHei" panose="020B0604030504040204" pitchFamily="34" charset="-120"/>
-              </a:rPr>
-              <a:t>十字架的愛</a:t>
-            </a:r>
-            <a:r>
-              <a:rPr lang="zh-TW" altLang="en-US" b="1" dirty="0" smtClean="0">
-                <a:latin typeface="Microsoft JhengHei" panose="020B0604030504040204" pitchFamily="34" charset="-120"/>
-                <a:ea typeface="Microsoft JhengHei" panose="020B0604030504040204" pitchFamily="34" charset="-120"/>
-              </a:rPr>
-              <a:t> </a:t>
-            </a:r>
-            <a:endParaRPr lang="zh-TW" altLang="en-US" b="1" dirty="0">
-              <a:latin typeface="Microsoft JhengHei" panose="020B0604030504040204" pitchFamily="34" charset="-120"/>
-              <a:ea typeface="Microsoft JhengHei" panose="020B0604030504040204" pitchFamily="34" charset="-120"/>
-            </a:endParaRPr>
-          </a:p>
-        </p:txBody>
-      </p:sp>
-      <p:sp>
-        <p:nvSpPr>
-          <p:cNvPr id="3075" name="Rectangle 3"/>
-          <p:cNvSpPr>
-            <a:spLocks noGrp="1" noChangeArrowheads="1"/>
-          </p:cNvSpPr>
-          <p:nvPr>
-            <p:ph idx="1"/>
-          </p:nvPr>
-        </p:nvSpPr>
-        <p:spPr/>
+        <p:spPr>
+          <a:xfrm>
+            <a:off x="0" y="2660915"/>
+            <a:ext cx="12192000" cy="1143000"/>
+          </a:xfrm>
+        </p:spPr>
         <p:txBody>
           <a:bodyPr>
             <a:noAutofit/>
           </a:bodyPr>
           <a:lstStyle/>
           <a:p>
-            <a:pPr algn="ctr">
-              <a:buFontTx/>
-              <a:buNone/>
-            </a:pPr>
-            <a:r>
-              <a:rPr lang="zh-TW" altLang="en-US" sz="5400" b="1" dirty="0">
-                <a:latin typeface="Microsoft JhengHei" panose="020B0604030504040204" pitchFamily="34" charset="-120"/>
-                <a:ea typeface="Microsoft JhengHei" panose="020B0604030504040204" pitchFamily="34" charset="-120"/>
+            <a:r>
+              <a:rPr lang="zh-TW" altLang="en-US" sz="7200" b="1" i="1" dirty="0">
+                <a:solidFill>
+                  <a:srgbClr val="000066"/>
+                </a:solidFill>
+                <a:effectLst>
+                  <a:outerShdw blurRad="38100" dist="38100" dir="2700000" algn="tl">
+                    <a:srgbClr val="000000">
+                      <a:alpha val="43137"/>
+                    </a:srgbClr>
+                  </a:outerShdw>
+                </a:effectLst>
+                <a:latin typeface="微軟正黑體" pitchFamily="34" charset="-120"/>
+                <a:ea typeface="微軟正黑體" pitchFamily="34" charset="-120"/>
               </a:rPr>
-              <a:t>耶穌用</a:t>
-            </a:r>
-            <a:r>
-              <a:rPr lang="zh-TW" altLang="en-US" sz="5400" b="1" dirty="0">
-                <a:latin typeface="Microsoft JhengHei" panose="020B0604030504040204" pitchFamily="34" charset="-120"/>
-                <a:ea typeface="Microsoft JhengHei" panose="020B0604030504040204" pitchFamily="34" charset="-120"/>
-              </a:rPr>
-              <a:t>十字架  十字架</a:t>
-            </a:r>
-            <a:r>
-              <a:rPr lang="zh-TW" altLang="en-US" sz="5400" b="1" dirty="0">
-                <a:latin typeface="Microsoft JhengHei" panose="020B0604030504040204" pitchFamily="34" charset="-120"/>
-                <a:ea typeface="Microsoft JhengHei" panose="020B0604030504040204" pitchFamily="34" charset="-120"/>
-              </a:rPr>
-              <a:t>的愛</a:t>
-            </a:r>
-          </a:p>
-          <a:p>
-            <a:pPr algn="ctr">
-              <a:buFontTx/>
-              <a:buNone/>
-            </a:pPr>
-            <a:r>
-              <a:rPr lang="zh-TW" altLang="en-US" sz="5400" b="1" dirty="0">
-                <a:latin typeface="Microsoft JhengHei" panose="020B0604030504040204" pitchFamily="34" charset="-120"/>
-                <a:ea typeface="Microsoft JhengHei" panose="020B0604030504040204" pitchFamily="34" charset="-120"/>
-              </a:rPr>
-              <a:t>廢掉了代代冤仇</a:t>
-            </a:r>
-          </a:p>
-          <a:p>
-            <a:pPr algn="ctr">
-              <a:buFontTx/>
-              <a:buNone/>
-            </a:pPr>
-            <a:r>
-              <a:rPr lang="zh-TW" altLang="en-US" sz="5400" b="1" dirty="0">
-                <a:latin typeface="Microsoft JhengHei" panose="020B0604030504040204" pitchFamily="34" charset="-120"/>
-                <a:ea typeface="Microsoft JhengHei" panose="020B0604030504040204" pitchFamily="34" charset="-120"/>
-              </a:rPr>
-              <a:t>耶穌用</a:t>
-            </a:r>
-            <a:r>
-              <a:rPr lang="zh-TW" altLang="en-US" sz="5400" b="1" dirty="0">
-                <a:latin typeface="Microsoft JhengHei" panose="020B0604030504040204" pitchFamily="34" charset="-120"/>
-                <a:ea typeface="Microsoft JhengHei" panose="020B0604030504040204" pitchFamily="34" charset="-120"/>
-              </a:rPr>
-              <a:t>十字架  十字架</a:t>
-            </a:r>
-            <a:r>
-              <a:rPr lang="zh-TW" altLang="en-US" sz="5400" b="1" dirty="0">
-                <a:latin typeface="Microsoft JhengHei" panose="020B0604030504040204" pitchFamily="34" charset="-120"/>
-                <a:ea typeface="Microsoft JhengHei" panose="020B0604030504040204" pitchFamily="34" charset="-120"/>
-              </a:rPr>
-              <a:t>的愛</a:t>
-            </a:r>
-          </a:p>
-          <a:p>
-            <a:pPr algn="ctr">
-              <a:buFontTx/>
-              <a:buNone/>
-            </a:pPr>
-            <a:r>
-              <a:rPr lang="zh-TW" altLang="en-US" sz="5400" b="1" dirty="0">
-                <a:latin typeface="Microsoft JhengHei" panose="020B0604030504040204" pitchFamily="34" charset="-120"/>
-                <a:ea typeface="Microsoft JhengHei" panose="020B0604030504040204" pitchFamily="34" charset="-120"/>
-              </a:rPr>
-              <a:t>縮短了我們的距離</a:t>
+              <a:t>十字架的愛 </a:t>
             </a:r>
           </a:p>
         </p:txBody>
       </p:sp>
     </p:spTree>
+    <p:extLst>
+      <p:ext uri="{BB962C8B-B14F-4D97-AF65-F5344CB8AC3E}">
+        <p14:creationId xmlns:p14="http://schemas.microsoft.com/office/powerpoint/2010/main" val="388492399"/>
+      </p:ext>
+    </p:extLst>
   </p:cSld>
   <p:clrMapOvr>
     <a:masterClrMapping/>
   </p:clrMapOvr>
-  <p:timing>
-    <p:tnLst>
-      <p:par>
-        <p:cTn id="1" dur="indefinite" restart="never" nodeType="tmRoot"/>
-      </p:par>
-    </p:tnLst>
-  </p:timing>
 </p:sld>
 </file>
 
@@ -3276,7 +3196,13 @@
   <p:cSld>
     <p:spTree>
       <p:nvGrpSpPr>
-        <p:cNvPr id="1" name=""/>
+        <p:cNvPr id="1" name="">
+          <a:extLst>
+            <a:ext uri="{FF2B5EF4-FFF2-40B4-BE49-F238E27FC236}">
+              <a16:creationId xmlns:a16="http://schemas.microsoft.com/office/drawing/2014/main" id="{499F6A04-361B-D03C-72FC-83746A3861FC}"/>
+            </a:ext>
+          </a:extLst>
+        </p:cNvPr>
         <p:cNvGrpSpPr/>
         <p:nvPr/>
       </p:nvGrpSpPr>
@@ -3290,124 +3216,141 @@
       </p:grpSpPr>
       <p:sp>
         <p:nvSpPr>
-          <p:cNvPr id="4" name="標題 3"/>
-          <p:cNvSpPr>
-            <a:spLocks noGrp="1"/>
-          </p:cNvSpPr>
-          <p:nvPr>
-            <p:ph type="title"/>
-          </p:nvPr>
-        </p:nvSpPr>
-        <p:spPr/>
-        <p:txBody>
-          <a:bodyPr>
+          <p:cNvPr id="5" name="內容版面配置區 4">
+            <a:extLst>
+              <a:ext uri="{FF2B5EF4-FFF2-40B4-BE49-F238E27FC236}">
+                <a16:creationId xmlns:a16="http://schemas.microsoft.com/office/drawing/2014/main" id="{EE77592B-EE8B-614D-4160-CDFC7BCE80DB}"/>
+              </a:ext>
+            </a:extLst>
+          </p:cNvPr>
+          <p:cNvSpPr>
+            <a:spLocks noGrp="1"/>
+          </p:cNvSpPr>
+          <p:nvPr>
+            <p:ph idx="1"/>
+          </p:nvPr>
+        </p:nvSpPr>
+        <p:spPr>
+          <a:xfrm>
+            <a:off x="0" y="2084853"/>
+            <a:ext cx="12192000" cy="2404863"/>
+          </a:xfrm>
+        </p:spPr>
+        <p:txBody>
+          <a:bodyPr anchor="ctr">
             <a:normAutofit/>
           </a:bodyPr>
           <a:lstStyle/>
           <a:p>
-            <a:r>
-              <a:rPr lang="zh-TW" altLang="en-US" b="1" dirty="0">
+            <a:pPr algn="ctr">
+              <a:buNone/>
+            </a:pPr>
+            <a:r>
+              <a:rPr lang="zh-TW" altLang="en-US" sz="6400" b="1" dirty="0">
+                <a:solidFill>
+                  <a:srgbClr val="000066"/>
+                </a:solidFill>
+                <a:latin typeface="微軟正黑體" pitchFamily="34" charset="-120"/>
+                <a:ea typeface="微軟正黑體" pitchFamily="34" charset="-120"/>
+              </a:rPr>
+              <a:t>耶穌用十字架  十字架的愛</a:t>
+            </a:r>
+          </a:p>
+          <a:p>
+            <a:pPr algn="ctr">
+              <a:buNone/>
+            </a:pPr>
+            <a:r>
+              <a:rPr lang="zh-TW" altLang="en-US" sz="6400" b="1" dirty="0">
+                <a:solidFill>
+                  <a:srgbClr val="000066"/>
+                </a:solidFill>
+                <a:latin typeface="微軟正黑體" pitchFamily="34" charset="-120"/>
+                <a:ea typeface="微軟正黑體" pitchFamily="34" charset="-120"/>
+              </a:rPr>
+              <a:t>廢掉了代代冤仇</a:t>
+            </a:r>
+          </a:p>
+        </p:txBody>
+      </p:sp>
+      <p:sp>
+        <p:nvSpPr>
+          <p:cNvPr id="3" name="TextBox 2">
+            <a:extLst>
+              <a:ext uri="{FF2B5EF4-FFF2-40B4-BE49-F238E27FC236}">
+                <a16:creationId xmlns:a16="http://schemas.microsoft.com/office/drawing/2014/main" id="{FA175DD0-F211-14DE-420F-4A50F79B6BD2}"/>
+              </a:ext>
+            </a:extLst>
+          </p:cNvPr>
+          <p:cNvSpPr txBox="1"/>
+          <p:nvPr/>
+        </p:nvSpPr>
+        <p:spPr>
+          <a:xfrm>
+            <a:off x="0" y="5157194"/>
+            <a:ext cx="12192000" cy="584775"/>
+          </a:xfrm>
+          <a:prstGeom prst="rect">
+            <a:avLst/>
+          </a:prstGeom>
+          <a:noFill/>
+        </p:spPr>
+        <p:txBody>
+          <a:bodyPr wrap="square" rtlCol="0">
+            <a:spAutoFit/>
+          </a:bodyPr>
+          <a:lstStyle/>
+          <a:p>
+            <a:pPr algn="ctr"/>
+            <a:r>
+              <a:rPr lang="en-US" sz="3200" b="1" dirty="0">
+                <a:solidFill>
+                  <a:srgbClr val="000066"/>
+                </a:solidFill>
                 <a:latin typeface="Microsoft JhengHei" panose="020B0604030504040204" pitchFamily="34" charset="-120"/>
                 <a:ea typeface="Microsoft JhengHei" panose="020B0604030504040204" pitchFamily="34" charset="-120"/>
               </a:rPr>
-              <a:t>十字架的愛</a:t>
-            </a:r>
-            <a:r>
-              <a:rPr lang="zh-TW" altLang="en-US" b="1" dirty="0">
+              <a:t>( </a:t>
+            </a:r>
+            <a:r>
+              <a:rPr lang="zh-CN" altLang="en-US" sz="3200" b="1" dirty="0">
+                <a:solidFill>
+                  <a:srgbClr val="000066"/>
+                </a:solidFill>
                 <a:latin typeface="Microsoft JhengHei" panose="020B0604030504040204" pitchFamily="34" charset="-120"/>
                 <a:ea typeface="Microsoft JhengHei" panose="020B0604030504040204" pitchFamily="34" charset="-120"/>
               </a:rPr>
-              <a:t> </a:t>
-            </a:r>
-            <a:endParaRPr lang="zh-TW" altLang="en-US" b="1" dirty="0">
-              <a:latin typeface="Microsoft JhengHei" panose="020B0604030504040204" pitchFamily="34" charset="-120"/>
-              <a:ea typeface="Microsoft JhengHei" panose="020B0604030504040204" pitchFamily="34" charset="-120"/>
-            </a:endParaRPr>
-          </a:p>
-        </p:txBody>
-      </p:sp>
-      <p:sp>
-        <p:nvSpPr>
-          <p:cNvPr id="4099" name="Rectangle 3"/>
-          <p:cNvSpPr>
-            <a:spLocks noGrp="1" noChangeArrowheads="1"/>
-          </p:cNvSpPr>
-          <p:nvPr>
-            <p:ph idx="1"/>
-          </p:nvPr>
-        </p:nvSpPr>
-        <p:spPr/>
-        <p:txBody>
-          <a:bodyPr>
-            <a:normAutofit/>
-          </a:bodyPr>
-          <a:lstStyle/>
-          <a:p>
-            <a:pPr algn="ctr">
-              <a:buFontTx/>
-              <a:buNone/>
-            </a:pPr>
-            <a:r>
-              <a:rPr lang="zh-TW" altLang="en-US" sz="5400" b="1" dirty="0">
+              <a:t>正歌</a:t>
+            </a:r>
+            <a:r>
+              <a:rPr lang="en-US" sz="3200" b="1" dirty="0">
+                <a:solidFill>
+                  <a:srgbClr val="000066"/>
+                </a:solidFill>
                 <a:latin typeface="Microsoft JhengHei" panose="020B0604030504040204" pitchFamily="34" charset="-120"/>
                 <a:ea typeface="Microsoft JhengHei" panose="020B0604030504040204" pitchFamily="34" charset="-120"/>
               </a:rPr>
-              <a:t>祂用十字架  十字架的愛</a:t>
-            </a:r>
-          </a:p>
-          <a:p>
-            <a:pPr algn="ctr">
-              <a:buFontTx/>
-              <a:buNone/>
-            </a:pPr>
-            <a:r>
-              <a:rPr lang="zh-TW" altLang="en-US" sz="5400" b="1" dirty="0">
-                <a:latin typeface="Microsoft JhengHei" panose="020B0604030504040204" pitchFamily="34" charset="-120"/>
-                <a:ea typeface="Microsoft JhengHei" panose="020B0604030504040204" pitchFamily="34" charset="-120"/>
-              </a:rPr>
-              <a:t>征服全人類</a:t>
-            </a:r>
-          </a:p>
-          <a:p>
-            <a:pPr algn="ctr">
-              <a:buFontTx/>
-              <a:buNone/>
-            </a:pPr>
-            <a:r>
-              <a:rPr lang="zh-TW" altLang="en-US" sz="5400" b="1" dirty="0">
-                <a:latin typeface="Microsoft JhengHei" panose="020B0604030504040204" pitchFamily="34" charset="-120"/>
-                <a:ea typeface="Microsoft JhengHei" panose="020B0604030504040204" pitchFamily="34" charset="-120"/>
-              </a:rPr>
-              <a:t>無不屈膝  無不口稱</a:t>
-            </a:r>
-          </a:p>
-          <a:p>
-            <a:pPr algn="ctr">
-              <a:buFontTx/>
-              <a:buNone/>
-            </a:pPr>
-            <a:r>
-              <a:rPr lang="zh-TW" altLang="en-US" sz="5400" b="1" dirty="0">
-                <a:latin typeface="Microsoft JhengHei" panose="020B0604030504040204" pitchFamily="34" charset="-120"/>
-                <a:ea typeface="Microsoft JhengHei" panose="020B0604030504040204" pitchFamily="34" charset="-120"/>
-              </a:rPr>
-              <a:t>耶穌基督為救主</a:t>
-            </a:r>
+              <a:t> )</a:t>
+            </a:r>
+            <a:endParaRPr lang="vi-VN" sz="3200" b="1" dirty="0">
+              <a:solidFill>
+                <a:srgbClr val="000066"/>
+              </a:solidFill>
+              <a:ea typeface="Microsoft JhengHei" panose="020B0604030504040204" pitchFamily="34" charset="-120"/>
+            </a:endParaRPr>
           </a:p>
         </p:txBody>
       </p:sp>
     </p:spTree>
+    <p:extLst>
+      <p:ext uri="{BB962C8B-B14F-4D97-AF65-F5344CB8AC3E}">
+        <p14:creationId xmlns:p14="http://schemas.microsoft.com/office/powerpoint/2010/main" val="3885075056"/>
+      </p:ext>
+    </p:extLst>
   </p:cSld>
   <p:clrMapOvr>
     <a:masterClrMapping/>
   </p:clrMapOvr>
-  <p:timing>
-    <p:tnLst>
-      <p:par>
-        <p:cTn id="1" dur="indefinite" restart="never" nodeType="tmRoot"/>
-      </p:par>
-    </p:tnLst>
-  </p:timing>
 </p:sld>
 </file>
 
@@ -3416,7 +3359,13 @@
   <p:cSld>
     <p:spTree>
       <p:nvGrpSpPr>
-        <p:cNvPr id="1" name=""/>
+        <p:cNvPr id="1" name="">
+          <a:extLst>
+            <a:ext uri="{FF2B5EF4-FFF2-40B4-BE49-F238E27FC236}">
+              <a16:creationId xmlns:a16="http://schemas.microsoft.com/office/drawing/2014/main" id="{D447FEE9-79B9-4BF4-48E1-B3D7CA42AB9C}"/>
+            </a:ext>
+          </a:extLst>
+        </p:cNvPr>
         <p:cNvGrpSpPr/>
         <p:nvPr/>
       </p:nvGrpSpPr>
@@ -3430,144 +3379,823 @@
       </p:grpSpPr>
       <p:sp>
         <p:nvSpPr>
-          <p:cNvPr id="3" name="標題 2"/>
-          <p:cNvSpPr>
-            <a:spLocks noGrp="1"/>
-          </p:cNvSpPr>
-          <p:nvPr>
-            <p:ph type="title"/>
-          </p:nvPr>
-        </p:nvSpPr>
-        <p:spPr/>
-        <p:txBody>
-          <a:bodyPr>
+          <p:cNvPr id="5" name="內容版面配置區 4">
+            <a:extLst>
+              <a:ext uri="{FF2B5EF4-FFF2-40B4-BE49-F238E27FC236}">
+                <a16:creationId xmlns:a16="http://schemas.microsoft.com/office/drawing/2014/main" id="{73DE100B-B095-65C9-E758-0C0A9633DB33}"/>
+              </a:ext>
+            </a:extLst>
+          </p:cNvPr>
+          <p:cNvSpPr>
+            <a:spLocks noGrp="1"/>
+          </p:cNvSpPr>
+          <p:nvPr>
+            <p:ph idx="1"/>
+          </p:nvPr>
+        </p:nvSpPr>
+        <p:spPr>
+          <a:xfrm>
+            <a:off x="0" y="2084853"/>
+            <a:ext cx="12192000" cy="2404863"/>
+          </a:xfrm>
+        </p:spPr>
+        <p:txBody>
+          <a:bodyPr anchor="ctr">
             <a:normAutofit/>
           </a:bodyPr>
           <a:lstStyle/>
           <a:p>
-            <a:r>
-              <a:rPr lang="zh-TW" altLang="en-US" b="1" dirty="0">
+            <a:pPr algn="ctr">
+              <a:buNone/>
+            </a:pPr>
+            <a:r>
+              <a:rPr lang="zh-TW" altLang="en-US" sz="6400" b="1" dirty="0">
+                <a:solidFill>
+                  <a:srgbClr val="000066"/>
+                </a:solidFill>
+                <a:latin typeface="微軟正黑體" pitchFamily="34" charset="-120"/>
+                <a:ea typeface="微軟正黑體" pitchFamily="34" charset="-120"/>
+              </a:rPr>
+              <a:t>耶穌用十字架  十字架的愛</a:t>
+            </a:r>
+          </a:p>
+          <a:p>
+            <a:pPr algn="ctr">
+              <a:buNone/>
+            </a:pPr>
+            <a:r>
+              <a:rPr lang="zh-TW" altLang="en-US" sz="6400" b="1" dirty="0">
+                <a:solidFill>
+                  <a:srgbClr val="000066"/>
+                </a:solidFill>
+                <a:latin typeface="微軟正黑體" pitchFamily="34" charset="-120"/>
+                <a:ea typeface="微軟正黑體" pitchFamily="34" charset="-120"/>
+              </a:rPr>
+              <a:t>縮短了我們的距離</a:t>
+            </a:r>
+          </a:p>
+        </p:txBody>
+      </p:sp>
+      <p:sp>
+        <p:nvSpPr>
+          <p:cNvPr id="3" name="TextBox 2">
+            <a:extLst>
+              <a:ext uri="{FF2B5EF4-FFF2-40B4-BE49-F238E27FC236}">
+                <a16:creationId xmlns:a16="http://schemas.microsoft.com/office/drawing/2014/main" id="{F7CDCC11-FD16-AE86-69F7-1A70439777C7}"/>
+              </a:ext>
+            </a:extLst>
+          </p:cNvPr>
+          <p:cNvSpPr txBox="1"/>
+          <p:nvPr/>
+        </p:nvSpPr>
+        <p:spPr>
+          <a:xfrm>
+            <a:off x="0" y="5157194"/>
+            <a:ext cx="12192000" cy="584775"/>
+          </a:xfrm>
+          <a:prstGeom prst="rect">
+            <a:avLst/>
+          </a:prstGeom>
+          <a:noFill/>
+        </p:spPr>
+        <p:txBody>
+          <a:bodyPr wrap="square" rtlCol="0">
+            <a:spAutoFit/>
+          </a:bodyPr>
+          <a:lstStyle/>
+          <a:p>
+            <a:pPr algn="ctr"/>
+            <a:r>
+              <a:rPr lang="en-US" sz="3200" b="1" dirty="0">
+                <a:solidFill>
+                  <a:srgbClr val="000066"/>
+                </a:solidFill>
                 <a:latin typeface="Microsoft JhengHei" panose="020B0604030504040204" pitchFamily="34" charset="-120"/>
                 <a:ea typeface="Microsoft JhengHei" panose="020B0604030504040204" pitchFamily="34" charset="-120"/>
               </a:rPr>
-              <a:t>十字架的愛</a:t>
-            </a:r>
-            <a:r>
-              <a:rPr lang="zh-TW" altLang="en-US" b="1" dirty="0">
+              <a:t>( </a:t>
+            </a:r>
+            <a:r>
+              <a:rPr lang="zh-CN" altLang="en-US" sz="3200" b="1">
+                <a:solidFill>
+                  <a:srgbClr val="000066"/>
+                </a:solidFill>
+                <a:latin typeface="Microsoft JhengHei" panose="020B0604030504040204" pitchFamily="34" charset="-120"/>
+                <a:ea typeface="Microsoft JhengHei" panose="020B0604030504040204" pitchFamily="34" charset="-120"/>
+              </a:rPr>
+              <a:t>正歌</a:t>
+            </a:r>
+            <a:r>
+              <a:rPr lang="en-US" sz="3200" b="1">
+                <a:solidFill>
+                  <a:srgbClr val="000066"/>
+                </a:solidFill>
                 <a:latin typeface="Microsoft JhengHei" panose="020B0604030504040204" pitchFamily="34" charset="-120"/>
                 <a:ea typeface="Microsoft JhengHei" panose="020B0604030504040204" pitchFamily="34" charset="-120"/>
               </a:rPr>
               <a:t> </a:t>
             </a:r>
-            <a:endParaRPr lang="zh-TW" altLang="en-US" b="1" dirty="0">
-              <a:latin typeface="Microsoft JhengHei" panose="020B0604030504040204" pitchFamily="34" charset="-120"/>
-              <a:ea typeface="Microsoft JhengHei" panose="020B0604030504040204" pitchFamily="34" charset="-120"/>
-            </a:endParaRPr>
-          </a:p>
-        </p:txBody>
-      </p:sp>
-      <p:sp>
-        <p:nvSpPr>
-          <p:cNvPr id="5123" name="Rectangle 3"/>
-          <p:cNvSpPr>
-            <a:spLocks noGrp="1" noChangeArrowheads="1"/>
-          </p:cNvSpPr>
-          <p:nvPr>
-            <p:ph idx="1"/>
-          </p:nvPr>
-        </p:nvSpPr>
-        <p:spPr/>
-        <p:txBody>
-          <a:bodyPr>
-            <a:noAutofit/>
-          </a:bodyPr>
-          <a:lstStyle/>
-          <a:p>
-            <a:pPr algn="ctr">
-              <a:buNone/>
-            </a:pPr>
-            <a:r>
-              <a:rPr lang="zh-TW" altLang="en-US" sz="5400" b="1" dirty="0">
+            <a:r>
+              <a:rPr lang="en-US" sz="3200" b="1" dirty="0">
+                <a:solidFill>
+                  <a:srgbClr val="000066"/>
+                </a:solidFill>
                 <a:latin typeface="Microsoft JhengHei" panose="020B0604030504040204" pitchFamily="34" charset="-120"/>
                 <a:ea typeface="Microsoft JhengHei" panose="020B0604030504040204" pitchFamily="34" charset="-120"/>
               </a:rPr>
-              <a:t>腳步踏向重重山</a:t>
-            </a:r>
-            <a:endParaRPr lang="en-US" altLang="zh-TW" sz="5400" b="1" dirty="0">
-              <a:latin typeface="Microsoft JhengHei" panose="020B0604030504040204" pitchFamily="34" charset="-120"/>
+              <a:t>)</a:t>
+            </a:r>
+            <a:endParaRPr lang="vi-VN" sz="3200" b="1" dirty="0">
+              <a:solidFill>
+                <a:srgbClr val="000066"/>
+              </a:solidFill>
               <a:ea typeface="Microsoft JhengHei" panose="020B0604030504040204" pitchFamily="34" charset="-120"/>
             </a:endParaRPr>
           </a:p>
-          <a:p>
-            <a:pPr algn="ctr">
-              <a:buNone/>
-            </a:pPr>
-            <a:r>
-              <a:rPr lang="zh-TW" altLang="en-US" sz="5400" b="1" dirty="0">
-                <a:latin typeface="Microsoft JhengHei" panose="020B0604030504040204" pitchFamily="34" charset="-120"/>
-                <a:ea typeface="Microsoft JhengHei" panose="020B0604030504040204" pitchFamily="34" charset="-120"/>
-              </a:rPr>
-              <a:t>手兒敲開扇扇門</a:t>
-            </a:r>
-          </a:p>
-          <a:p>
-            <a:pPr algn="ctr">
-              <a:buNone/>
-            </a:pPr>
-            <a:r>
-              <a:rPr lang="zh-TW" altLang="en-US" sz="5400" b="1" dirty="0">
-                <a:latin typeface="Microsoft JhengHei" panose="020B0604030504040204" pitchFamily="34" charset="-120"/>
-                <a:ea typeface="Microsoft JhengHei" panose="020B0604030504040204" pitchFamily="34" charset="-120"/>
-              </a:rPr>
-              <a:t>報答主恩一生</a:t>
-            </a:r>
-            <a:endParaRPr lang="en-US" altLang="zh-TW" sz="5400" b="1" dirty="0">
-              <a:latin typeface="Microsoft JhengHei" panose="020B0604030504040204" pitchFamily="34" charset="-120"/>
-              <a:ea typeface="Microsoft JhengHei" panose="020B0604030504040204" pitchFamily="34" charset="-120"/>
-            </a:endParaRPr>
-          </a:p>
-          <a:p>
-            <a:pPr algn="ctr">
-              <a:buNone/>
-            </a:pPr>
-            <a:r>
-              <a:rPr lang="zh-TW" altLang="en-US" sz="5400" b="1" dirty="0">
-                <a:latin typeface="Microsoft JhengHei" panose="020B0604030504040204" pitchFamily="34" charset="-120"/>
-                <a:ea typeface="Microsoft JhengHei" panose="020B0604030504040204" pitchFamily="34" charset="-120"/>
-              </a:rPr>
-              <a:t>無求無怨也無悔</a:t>
-            </a:r>
-            <a:endParaRPr lang="en-US" altLang="zh-TW" sz="5400" b="1" dirty="0">
-              <a:latin typeface="Microsoft JhengHei" panose="020B0604030504040204" pitchFamily="34" charset="-120"/>
-              <a:ea typeface="Microsoft JhengHei" panose="020B0604030504040204" pitchFamily="34" charset="-120"/>
-            </a:endParaRPr>
-          </a:p>
-          <a:p>
-            <a:pPr algn="ctr">
-              <a:buNone/>
-            </a:pPr>
-            <a:r>
-              <a:rPr lang="zh-TW" altLang="en-US" sz="5400" b="1" dirty="0">
-                <a:latin typeface="Microsoft JhengHei" panose="020B0604030504040204" pitchFamily="34" charset="-120"/>
-                <a:ea typeface="Microsoft JhengHei" panose="020B0604030504040204" pitchFamily="34" charset="-120"/>
-              </a:rPr>
-              <a:t>我們是神的僕人</a:t>
-            </a:r>
-          </a:p>
         </p:txBody>
       </p:sp>
     </p:spTree>
+    <p:extLst>
+      <p:ext uri="{BB962C8B-B14F-4D97-AF65-F5344CB8AC3E}">
+        <p14:creationId xmlns:p14="http://schemas.microsoft.com/office/powerpoint/2010/main" val="3102488863"/>
+      </p:ext>
+    </p:extLst>
   </p:cSld>
   <p:clrMapOvr>
     <a:masterClrMapping/>
   </p:clrMapOvr>
-  <p:timing>
-    <p:tnLst>
-      <p:par>
-        <p:cTn id="1" dur="indefinite" restart="never" nodeType="tmRoot"/>
-      </p:par>
-    </p:tnLst>
-  </p:timing>
+</p:sld>
+</file>
+
+<file path=ppt/slides/slide4.xml><?xml version="1.0" encoding="utf-8"?>
+<p:sld xmlns:a="http://schemas.openxmlformats.org/drawingml/2006/main" xmlns:r="http://schemas.openxmlformats.org/officeDocument/2006/relationships" xmlns:p="http://schemas.openxmlformats.org/presentationml/2006/main">
+  <p:cSld>
+    <p:spTree>
+      <p:nvGrpSpPr>
+        <p:cNvPr id="1" name="">
+          <a:extLst>
+            <a:ext uri="{FF2B5EF4-FFF2-40B4-BE49-F238E27FC236}">
+              <a16:creationId xmlns:a16="http://schemas.microsoft.com/office/drawing/2014/main" id="{59B8084C-0241-549F-6A48-32DBC9FE2FE0}"/>
+            </a:ext>
+          </a:extLst>
+        </p:cNvPr>
+        <p:cNvGrpSpPr/>
+        <p:nvPr/>
+      </p:nvGrpSpPr>
+      <p:grpSpPr>
+        <a:xfrm>
+          <a:off x="0" y="0"/>
+          <a:ext cx="0" cy="0"/>
+          <a:chOff x="0" y="0"/>
+          <a:chExt cx="0" cy="0"/>
+        </a:xfrm>
+      </p:grpSpPr>
+      <p:sp>
+        <p:nvSpPr>
+          <p:cNvPr id="5" name="內容版面配置區 4">
+            <a:extLst>
+              <a:ext uri="{FF2B5EF4-FFF2-40B4-BE49-F238E27FC236}">
+                <a16:creationId xmlns:a16="http://schemas.microsoft.com/office/drawing/2014/main" id="{8321A802-58AA-68CA-1DEA-36D6B02F2487}"/>
+              </a:ext>
+            </a:extLst>
+          </p:cNvPr>
+          <p:cNvSpPr>
+            <a:spLocks noGrp="1"/>
+          </p:cNvSpPr>
+          <p:nvPr>
+            <p:ph idx="1"/>
+          </p:nvPr>
+        </p:nvSpPr>
+        <p:spPr>
+          <a:xfrm>
+            <a:off x="0" y="2084853"/>
+            <a:ext cx="12192000" cy="2404863"/>
+          </a:xfrm>
+        </p:spPr>
+        <p:txBody>
+          <a:bodyPr anchor="ctr">
+            <a:normAutofit/>
+          </a:bodyPr>
+          <a:lstStyle/>
+          <a:p>
+            <a:pPr algn="ctr">
+              <a:buNone/>
+            </a:pPr>
+            <a:r>
+              <a:rPr lang="zh-TW" altLang="en-US" sz="6400" b="1" dirty="0">
+                <a:solidFill>
+                  <a:srgbClr val="000066"/>
+                </a:solidFill>
+                <a:latin typeface="微軟正黑體" pitchFamily="34" charset="-120"/>
+                <a:ea typeface="微軟正黑體" pitchFamily="34" charset="-120"/>
+              </a:rPr>
+              <a:t>祂用十字架  十字架的愛</a:t>
+            </a:r>
+          </a:p>
+          <a:p>
+            <a:pPr algn="ctr">
+              <a:buNone/>
+            </a:pPr>
+            <a:r>
+              <a:rPr lang="zh-TW" altLang="en-US" sz="6400" b="1" dirty="0">
+                <a:solidFill>
+                  <a:srgbClr val="000066"/>
+                </a:solidFill>
+                <a:latin typeface="微軟正黑體" pitchFamily="34" charset="-120"/>
+                <a:ea typeface="微軟正黑體" pitchFamily="34" charset="-120"/>
+              </a:rPr>
+              <a:t>征服全人類</a:t>
+            </a:r>
+          </a:p>
+        </p:txBody>
+      </p:sp>
+      <p:sp>
+        <p:nvSpPr>
+          <p:cNvPr id="3" name="TextBox 2">
+            <a:extLst>
+              <a:ext uri="{FF2B5EF4-FFF2-40B4-BE49-F238E27FC236}">
+                <a16:creationId xmlns:a16="http://schemas.microsoft.com/office/drawing/2014/main" id="{674DC754-52DF-80B0-3FE7-E7FAD187F9C8}"/>
+              </a:ext>
+            </a:extLst>
+          </p:cNvPr>
+          <p:cNvSpPr txBox="1"/>
+          <p:nvPr/>
+        </p:nvSpPr>
+        <p:spPr>
+          <a:xfrm>
+            <a:off x="0" y="5157194"/>
+            <a:ext cx="12192000" cy="584775"/>
+          </a:xfrm>
+          <a:prstGeom prst="rect">
+            <a:avLst/>
+          </a:prstGeom>
+          <a:noFill/>
+        </p:spPr>
+        <p:txBody>
+          <a:bodyPr wrap="square" rtlCol="0">
+            <a:spAutoFit/>
+          </a:bodyPr>
+          <a:lstStyle/>
+          <a:p>
+            <a:pPr algn="ctr"/>
+            <a:r>
+              <a:rPr lang="en-US" sz="3200" b="1" dirty="0">
+                <a:solidFill>
+                  <a:srgbClr val="000066"/>
+                </a:solidFill>
+                <a:latin typeface="Microsoft JhengHei" panose="020B0604030504040204" pitchFamily="34" charset="-120"/>
+                <a:ea typeface="Microsoft JhengHei" panose="020B0604030504040204" pitchFamily="34" charset="-120"/>
+              </a:rPr>
+              <a:t>( </a:t>
+            </a:r>
+            <a:r>
+              <a:rPr lang="zh-CN" altLang="en-US" sz="3200" b="1">
+                <a:solidFill>
+                  <a:srgbClr val="000066"/>
+                </a:solidFill>
+                <a:latin typeface="Microsoft JhengHei" panose="020B0604030504040204" pitchFamily="34" charset="-120"/>
+                <a:ea typeface="Microsoft JhengHei" panose="020B0604030504040204" pitchFamily="34" charset="-120"/>
+              </a:rPr>
+              <a:t>正歌</a:t>
+            </a:r>
+            <a:r>
+              <a:rPr lang="en-US" sz="3200" b="1">
+                <a:solidFill>
+                  <a:srgbClr val="000066"/>
+                </a:solidFill>
+                <a:latin typeface="Microsoft JhengHei" panose="020B0604030504040204" pitchFamily="34" charset="-120"/>
+                <a:ea typeface="Microsoft JhengHei" panose="020B0604030504040204" pitchFamily="34" charset="-120"/>
+              </a:rPr>
+              <a:t> </a:t>
+            </a:r>
+            <a:r>
+              <a:rPr lang="en-US" sz="3200" b="1" dirty="0">
+                <a:solidFill>
+                  <a:srgbClr val="000066"/>
+                </a:solidFill>
+                <a:latin typeface="Microsoft JhengHei" panose="020B0604030504040204" pitchFamily="34" charset="-120"/>
+                <a:ea typeface="Microsoft JhengHei" panose="020B0604030504040204" pitchFamily="34" charset="-120"/>
+              </a:rPr>
+              <a:t>)</a:t>
+            </a:r>
+            <a:endParaRPr lang="vi-VN" sz="3200" b="1" dirty="0">
+              <a:solidFill>
+                <a:srgbClr val="000066"/>
+              </a:solidFill>
+              <a:ea typeface="Microsoft JhengHei" panose="020B0604030504040204" pitchFamily="34" charset="-120"/>
+            </a:endParaRPr>
+          </a:p>
+        </p:txBody>
+      </p:sp>
+    </p:spTree>
+    <p:extLst>
+      <p:ext uri="{BB962C8B-B14F-4D97-AF65-F5344CB8AC3E}">
+        <p14:creationId xmlns:p14="http://schemas.microsoft.com/office/powerpoint/2010/main" val="997360078"/>
+      </p:ext>
+    </p:extLst>
+  </p:cSld>
+  <p:clrMapOvr>
+    <a:masterClrMapping/>
+  </p:clrMapOvr>
+</p:sld>
+</file>
+
+<file path=ppt/slides/slide5.xml><?xml version="1.0" encoding="utf-8"?>
+<p:sld xmlns:a="http://schemas.openxmlformats.org/drawingml/2006/main" xmlns:r="http://schemas.openxmlformats.org/officeDocument/2006/relationships" xmlns:p="http://schemas.openxmlformats.org/presentationml/2006/main">
+  <p:cSld>
+    <p:spTree>
+      <p:nvGrpSpPr>
+        <p:cNvPr id="1" name="">
+          <a:extLst>
+            <a:ext uri="{FF2B5EF4-FFF2-40B4-BE49-F238E27FC236}">
+              <a16:creationId xmlns:a16="http://schemas.microsoft.com/office/drawing/2014/main" id="{872FE57A-59F8-2244-A267-03DF424054F5}"/>
+            </a:ext>
+          </a:extLst>
+        </p:cNvPr>
+        <p:cNvGrpSpPr/>
+        <p:nvPr/>
+      </p:nvGrpSpPr>
+      <p:grpSpPr>
+        <a:xfrm>
+          <a:off x="0" y="0"/>
+          <a:ext cx="0" cy="0"/>
+          <a:chOff x="0" y="0"/>
+          <a:chExt cx="0" cy="0"/>
+        </a:xfrm>
+      </p:grpSpPr>
+      <p:sp>
+        <p:nvSpPr>
+          <p:cNvPr id="5" name="內容版面配置區 4">
+            <a:extLst>
+              <a:ext uri="{FF2B5EF4-FFF2-40B4-BE49-F238E27FC236}">
+                <a16:creationId xmlns:a16="http://schemas.microsoft.com/office/drawing/2014/main" id="{313943B8-FD53-6396-4EA6-955A2BD8AC29}"/>
+              </a:ext>
+            </a:extLst>
+          </p:cNvPr>
+          <p:cNvSpPr>
+            <a:spLocks noGrp="1"/>
+          </p:cNvSpPr>
+          <p:nvPr>
+            <p:ph idx="1"/>
+          </p:nvPr>
+        </p:nvSpPr>
+        <p:spPr>
+          <a:xfrm>
+            <a:off x="0" y="2084853"/>
+            <a:ext cx="12192000" cy="2404863"/>
+          </a:xfrm>
+        </p:spPr>
+        <p:txBody>
+          <a:bodyPr anchor="ctr">
+            <a:normAutofit/>
+          </a:bodyPr>
+          <a:lstStyle/>
+          <a:p>
+            <a:pPr algn="ctr">
+              <a:buNone/>
+            </a:pPr>
+            <a:r>
+              <a:rPr lang="zh-TW" altLang="en-US" sz="6400" b="1" dirty="0">
+                <a:solidFill>
+                  <a:srgbClr val="000066"/>
+                </a:solidFill>
+                <a:latin typeface="微軟正黑體" pitchFamily="34" charset="-120"/>
+                <a:ea typeface="微軟正黑體" pitchFamily="34" charset="-120"/>
+              </a:rPr>
+              <a:t>無不屈膝  無不口稱</a:t>
+            </a:r>
+          </a:p>
+          <a:p>
+            <a:pPr algn="ctr">
+              <a:buNone/>
+            </a:pPr>
+            <a:r>
+              <a:rPr lang="zh-TW" altLang="en-US" sz="6400" b="1" dirty="0">
+                <a:solidFill>
+                  <a:srgbClr val="000066"/>
+                </a:solidFill>
+                <a:latin typeface="微軟正黑體" pitchFamily="34" charset="-120"/>
+                <a:ea typeface="微軟正黑體" pitchFamily="34" charset="-120"/>
+              </a:rPr>
+              <a:t>耶穌基督為救主</a:t>
+            </a:r>
+          </a:p>
+        </p:txBody>
+      </p:sp>
+      <p:sp>
+        <p:nvSpPr>
+          <p:cNvPr id="3" name="TextBox 2">
+            <a:extLst>
+              <a:ext uri="{FF2B5EF4-FFF2-40B4-BE49-F238E27FC236}">
+                <a16:creationId xmlns:a16="http://schemas.microsoft.com/office/drawing/2014/main" id="{833DEDD5-48A9-B7D9-B5AF-B9935AA440D1}"/>
+              </a:ext>
+            </a:extLst>
+          </p:cNvPr>
+          <p:cNvSpPr txBox="1"/>
+          <p:nvPr/>
+        </p:nvSpPr>
+        <p:spPr>
+          <a:xfrm>
+            <a:off x="0" y="5157194"/>
+            <a:ext cx="12192000" cy="584775"/>
+          </a:xfrm>
+          <a:prstGeom prst="rect">
+            <a:avLst/>
+          </a:prstGeom>
+          <a:noFill/>
+        </p:spPr>
+        <p:txBody>
+          <a:bodyPr wrap="square" rtlCol="0">
+            <a:spAutoFit/>
+          </a:bodyPr>
+          <a:lstStyle/>
+          <a:p>
+            <a:pPr algn="ctr"/>
+            <a:r>
+              <a:rPr lang="en-US" sz="3200" b="1" dirty="0">
+                <a:solidFill>
+                  <a:srgbClr val="000066"/>
+                </a:solidFill>
+                <a:latin typeface="Microsoft JhengHei" panose="020B0604030504040204" pitchFamily="34" charset="-120"/>
+                <a:ea typeface="Microsoft JhengHei" panose="020B0604030504040204" pitchFamily="34" charset="-120"/>
+              </a:rPr>
+              <a:t>( </a:t>
+            </a:r>
+            <a:r>
+              <a:rPr lang="zh-CN" altLang="en-US" sz="3200" b="1">
+                <a:solidFill>
+                  <a:srgbClr val="000066"/>
+                </a:solidFill>
+                <a:latin typeface="Microsoft JhengHei" panose="020B0604030504040204" pitchFamily="34" charset="-120"/>
+                <a:ea typeface="Microsoft JhengHei" panose="020B0604030504040204" pitchFamily="34" charset="-120"/>
+              </a:rPr>
+              <a:t>正歌</a:t>
+            </a:r>
+            <a:r>
+              <a:rPr lang="en-US" sz="3200" b="1">
+                <a:solidFill>
+                  <a:srgbClr val="000066"/>
+                </a:solidFill>
+                <a:latin typeface="Microsoft JhengHei" panose="020B0604030504040204" pitchFamily="34" charset="-120"/>
+                <a:ea typeface="Microsoft JhengHei" panose="020B0604030504040204" pitchFamily="34" charset="-120"/>
+              </a:rPr>
+              <a:t> </a:t>
+            </a:r>
+            <a:r>
+              <a:rPr lang="en-US" sz="3200" b="1" dirty="0">
+                <a:solidFill>
+                  <a:srgbClr val="000066"/>
+                </a:solidFill>
+                <a:latin typeface="Microsoft JhengHei" panose="020B0604030504040204" pitchFamily="34" charset="-120"/>
+                <a:ea typeface="Microsoft JhengHei" panose="020B0604030504040204" pitchFamily="34" charset="-120"/>
+              </a:rPr>
+              <a:t>)</a:t>
+            </a:r>
+            <a:endParaRPr lang="vi-VN" sz="3200" b="1" dirty="0">
+              <a:solidFill>
+                <a:srgbClr val="000066"/>
+              </a:solidFill>
+              <a:ea typeface="Microsoft JhengHei" panose="020B0604030504040204" pitchFamily="34" charset="-120"/>
+            </a:endParaRPr>
+          </a:p>
+        </p:txBody>
+      </p:sp>
+    </p:spTree>
+    <p:extLst>
+      <p:ext uri="{BB962C8B-B14F-4D97-AF65-F5344CB8AC3E}">
+        <p14:creationId xmlns:p14="http://schemas.microsoft.com/office/powerpoint/2010/main" val="733601462"/>
+      </p:ext>
+    </p:extLst>
+  </p:cSld>
+  <p:clrMapOvr>
+    <a:masterClrMapping/>
+  </p:clrMapOvr>
+</p:sld>
+</file>
+
+<file path=ppt/slides/slide6.xml><?xml version="1.0" encoding="utf-8"?>
+<p:sld xmlns:a="http://schemas.openxmlformats.org/drawingml/2006/main" xmlns:r="http://schemas.openxmlformats.org/officeDocument/2006/relationships" xmlns:p="http://schemas.openxmlformats.org/presentationml/2006/main">
+  <p:cSld>
+    <p:spTree>
+      <p:nvGrpSpPr>
+        <p:cNvPr id="1" name="">
+          <a:extLst>
+            <a:ext uri="{FF2B5EF4-FFF2-40B4-BE49-F238E27FC236}">
+              <a16:creationId xmlns:a16="http://schemas.microsoft.com/office/drawing/2014/main" id="{08804A22-5513-75E5-43D7-90C0C3BD0F1D}"/>
+            </a:ext>
+          </a:extLst>
+        </p:cNvPr>
+        <p:cNvGrpSpPr/>
+        <p:nvPr/>
+      </p:nvGrpSpPr>
+      <p:grpSpPr>
+        <a:xfrm>
+          <a:off x="0" y="0"/>
+          <a:ext cx="0" cy="0"/>
+          <a:chOff x="0" y="0"/>
+          <a:chExt cx="0" cy="0"/>
+        </a:xfrm>
+      </p:grpSpPr>
+      <p:sp>
+        <p:nvSpPr>
+          <p:cNvPr id="5" name="內容版面配置區 4">
+            <a:extLst>
+              <a:ext uri="{FF2B5EF4-FFF2-40B4-BE49-F238E27FC236}">
+                <a16:creationId xmlns:a16="http://schemas.microsoft.com/office/drawing/2014/main" id="{BBEB5755-916C-6CBE-73C9-D92392C93595}"/>
+              </a:ext>
+            </a:extLst>
+          </p:cNvPr>
+          <p:cNvSpPr>
+            <a:spLocks noGrp="1"/>
+          </p:cNvSpPr>
+          <p:nvPr>
+            <p:ph idx="1"/>
+          </p:nvPr>
+        </p:nvSpPr>
+        <p:spPr>
+          <a:xfrm>
+            <a:off x="0" y="2084853"/>
+            <a:ext cx="12192000" cy="2404863"/>
+          </a:xfrm>
+        </p:spPr>
+        <p:txBody>
+          <a:bodyPr anchor="ctr">
+            <a:normAutofit/>
+          </a:bodyPr>
+          <a:lstStyle/>
+          <a:p>
+            <a:pPr algn="ctr">
+              <a:buNone/>
+            </a:pPr>
+            <a:r>
+              <a:rPr lang="zh-TW" altLang="en-US" sz="6400" b="1" dirty="0">
+                <a:solidFill>
+                  <a:srgbClr val="000066"/>
+                </a:solidFill>
+                <a:latin typeface="微軟正黑體" pitchFamily="34" charset="-120"/>
+                <a:ea typeface="微軟正黑體" pitchFamily="34" charset="-120"/>
+              </a:rPr>
+              <a:t>腳步踏向重重山</a:t>
+            </a:r>
+          </a:p>
+          <a:p>
+            <a:pPr algn="ctr">
+              <a:buNone/>
+            </a:pPr>
+            <a:r>
+              <a:rPr lang="zh-TW" altLang="en-US" sz="6400" b="1" dirty="0">
+                <a:solidFill>
+                  <a:srgbClr val="000066"/>
+                </a:solidFill>
+                <a:latin typeface="微軟正黑體" pitchFamily="34" charset="-120"/>
+                <a:ea typeface="微軟正黑體" pitchFamily="34" charset="-120"/>
+              </a:rPr>
+              <a:t>手兒敲開扇扇門</a:t>
+            </a:r>
+          </a:p>
+        </p:txBody>
+      </p:sp>
+      <p:sp>
+        <p:nvSpPr>
+          <p:cNvPr id="3" name="TextBox 2">
+            <a:extLst>
+              <a:ext uri="{FF2B5EF4-FFF2-40B4-BE49-F238E27FC236}">
+                <a16:creationId xmlns:a16="http://schemas.microsoft.com/office/drawing/2014/main" id="{EB2F7D46-4A70-F850-1C35-568370244172}"/>
+              </a:ext>
+            </a:extLst>
+          </p:cNvPr>
+          <p:cNvSpPr txBox="1"/>
+          <p:nvPr/>
+        </p:nvSpPr>
+        <p:spPr>
+          <a:xfrm>
+            <a:off x="0" y="5157194"/>
+            <a:ext cx="12192000" cy="584775"/>
+          </a:xfrm>
+          <a:prstGeom prst="rect">
+            <a:avLst/>
+          </a:prstGeom>
+          <a:noFill/>
+        </p:spPr>
+        <p:txBody>
+          <a:bodyPr wrap="square" rtlCol="0">
+            <a:spAutoFit/>
+          </a:bodyPr>
+          <a:lstStyle/>
+          <a:p>
+            <a:pPr algn="ctr"/>
+            <a:r>
+              <a:rPr lang="en-US" sz="3200" b="1" dirty="0">
+                <a:solidFill>
+                  <a:srgbClr val="000066"/>
+                </a:solidFill>
+                <a:latin typeface="Microsoft JhengHei" panose="020B0604030504040204" pitchFamily="34" charset="-120"/>
+                <a:ea typeface="Microsoft JhengHei" panose="020B0604030504040204" pitchFamily="34" charset="-120"/>
+              </a:rPr>
+              <a:t>( </a:t>
+            </a:r>
+            <a:r>
+              <a:rPr lang="zh-CN" altLang="en-US" sz="3200" b="1" dirty="0">
+                <a:solidFill>
+                  <a:srgbClr val="000066"/>
+                </a:solidFill>
+                <a:latin typeface="Microsoft JhengHei" panose="020B0604030504040204" pitchFamily="34" charset="-120"/>
+                <a:ea typeface="Microsoft JhengHei" panose="020B0604030504040204" pitchFamily="34" charset="-120"/>
+              </a:rPr>
+              <a:t>副歌</a:t>
+            </a:r>
+            <a:r>
+              <a:rPr lang="en-US" sz="3200" b="1" dirty="0">
+                <a:solidFill>
+                  <a:srgbClr val="000066"/>
+                </a:solidFill>
+                <a:latin typeface="Microsoft JhengHei" panose="020B0604030504040204" pitchFamily="34" charset="-120"/>
+                <a:ea typeface="Microsoft JhengHei" panose="020B0604030504040204" pitchFamily="34" charset="-120"/>
+              </a:rPr>
+              <a:t> )</a:t>
+            </a:r>
+            <a:endParaRPr lang="vi-VN" sz="3200" b="1" dirty="0">
+              <a:solidFill>
+                <a:srgbClr val="000066"/>
+              </a:solidFill>
+              <a:ea typeface="Microsoft JhengHei" panose="020B0604030504040204" pitchFamily="34" charset="-120"/>
+            </a:endParaRPr>
+          </a:p>
+        </p:txBody>
+      </p:sp>
+    </p:spTree>
+    <p:extLst>
+      <p:ext uri="{BB962C8B-B14F-4D97-AF65-F5344CB8AC3E}">
+        <p14:creationId xmlns:p14="http://schemas.microsoft.com/office/powerpoint/2010/main" val="3515776726"/>
+      </p:ext>
+    </p:extLst>
+  </p:cSld>
+  <p:clrMapOvr>
+    <a:masterClrMapping/>
+  </p:clrMapOvr>
+</p:sld>
+</file>
+
+<file path=ppt/slides/slide7.xml><?xml version="1.0" encoding="utf-8"?>
+<p:sld xmlns:a="http://schemas.openxmlformats.org/drawingml/2006/main" xmlns:r="http://schemas.openxmlformats.org/officeDocument/2006/relationships" xmlns:p="http://schemas.openxmlformats.org/presentationml/2006/main">
+  <p:cSld>
+    <p:spTree>
+      <p:nvGrpSpPr>
+        <p:cNvPr id="1" name="">
+          <a:extLst>
+            <a:ext uri="{FF2B5EF4-FFF2-40B4-BE49-F238E27FC236}">
+              <a16:creationId xmlns:a16="http://schemas.microsoft.com/office/drawing/2014/main" id="{0FF8B143-07C3-E490-678F-7C82EACDA577}"/>
+            </a:ext>
+          </a:extLst>
+        </p:cNvPr>
+        <p:cNvGrpSpPr/>
+        <p:nvPr/>
+      </p:nvGrpSpPr>
+      <p:grpSpPr>
+        <a:xfrm>
+          <a:off x="0" y="0"/>
+          <a:ext cx="0" cy="0"/>
+          <a:chOff x="0" y="0"/>
+          <a:chExt cx="0" cy="0"/>
+        </a:xfrm>
+      </p:grpSpPr>
+      <p:sp>
+        <p:nvSpPr>
+          <p:cNvPr id="5" name="內容版面配置區 4">
+            <a:extLst>
+              <a:ext uri="{FF2B5EF4-FFF2-40B4-BE49-F238E27FC236}">
+                <a16:creationId xmlns:a16="http://schemas.microsoft.com/office/drawing/2014/main" id="{5E0815DB-6465-6E0B-4C92-1FFBE4AC186A}"/>
+              </a:ext>
+            </a:extLst>
+          </p:cNvPr>
+          <p:cNvSpPr>
+            <a:spLocks noGrp="1"/>
+          </p:cNvSpPr>
+          <p:nvPr>
+            <p:ph idx="1"/>
+          </p:nvPr>
+        </p:nvSpPr>
+        <p:spPr>
+          <a:xfrm>
+            <a:off x="0" y="2084853"/>
+            <a:ext cx="12192000" cy="2404863"/>
+          </a:xfrm>
+        </p:spPr>
+        <p:txBody>
+          <a:bodyPr anchor="ctr">
+            <a:normAutofit/>
+          </a:bodyPr>
+          <a:lstStyle/>
+          <a:p>
+            <a:pPr algn="ctr">
+              <a:buNone/>
+            </a:pPr>
+            <a:r>
+              <a:rPr lang="zh-TW" altLang="en-US" sz="6400" b="1" dirty="0">
+                <a:solidFill>
+                  <a:srgbClr val="000066"/>
+                </a:solidFill>
+                <a:latin typeface="微軟正黑體" pitchFamily="34" charset="-120"/>
+                <a:ea typeface="微軟正黑體" pitchFamily="34" charset="-120"/>
+              </a:rPr>
+              <a:t>報答主恩一生  無求無怨也無悔</a:t>
+            </a:r>
+          </a:p>
+          <a:p>
+            <a:pPr algn="ctr">
+              <a:buNone/>
+            </a:pPr>
+            <a:r>
+              <a:rPr lang="zh-TW" altLang="en-US" sz="6400" b="1" dirty="0">
+                <a:solidFill>
+                  <a:srgbClr val="000066"/>
+                </a:solidFill>
+                <a:latin typeface="微軟正黑體" pitchFamily="34" charset="-120"/>
+                <a:ea typeface="微軟正黑體" pitchFamily="34" charset="-120"/>
+              </a:rPr>
+              <a:t>我們是神的僕人</a:t>
+            </a:r>
+          </a:p>
+        </p:txBody>
+      </p:sp>
+      <p:sp>
+        <p:nvSpPr>
+          <p:cNvPr id="3" name="TextBox 2">
+            <a:extLst>
+              <a:ext uri="{FF2B5EF4-FFF2-40B4-BE49-F238E27FC236}">
+                <a16:creationId xmlns:a16="http://schemas.microsoft.com/office/drawing/2014/main" id="{02BA0FA6-DB56-BF33-249E-EEE47005CE76}"/>
+              </a:ext>
+            </a:extLst>
+          </p:cNvPr>
+          <p:cNvSpPr txBox="1"/>
+          <p:nvPr/>
+        </p:nvSpPr>
+        <p:spPr>
+          <a:xfrm>
+            <a:off x="0" y="5157194"/>
+            <a:ext cx="12192000" cy="584775"/>
+          </a:xfrm>
+          <a:prstGeom prst="rect">
+            <a:avLst/>
+          </a:prstGeom>
+          <a:noFill/>
+        </p:spPr>
+        <p:txBody>
+          <a:bodyPr wrap="square" rtlCol="0">
+            <a:spAutoFit/>
+          </a:bodyPr>
+          <a:lstStyle/>
+          <a:p>
+            <a:pPr algn="ctr"/>
+            <a:r>
+              <a:rPr lang="en-US" sz="3200" b="1" dirty="0">
+                <a:solidFill>
+                  <a:srgbClr val="000066"/>
+                </a:solidFill>
+                <a:latin typeface="Microsoft JhengHei" panose="020B0604030504040204" pitchFamily="34" charset="-120"/>
+                <a:ea typeface="Microsoft JhengHei" panose="020B0604030504040204" pitchFamily="34" charset="-120"/>
+              </a:rPr>
+              <a:t>( </a:t>
+            </a:r>
+            <a:r>
+              <a:rPr lang="zh-CN" altLang="en-US" sz="3200" b="1" dirty="0">
+                <a:solidFill>
+                  <a:srgbClr val="000066"/>
+                </a:solidFill>
+                <a:latin typeface="Microsoft JhengHei" panose="020B0604030504040204" pitchFamily="34" charset="-120"/>
+                <a:ea typeface="Microsoft JhengHei" panose="020B0604030504040204" pitchFamily="34" charset="-120"/>
+              </a:rPr>
+              <a:t>副歌</a:t>
+            </a:r>
+            <a:r>
+              <a:rPr lang="en-US" sz="3200" b="1" dirty="0">
+                <a:solidFill>
+                  <a:srgbClr val="000066"/>
+                </a:solidFill>
+                <a:latin typeface="Microsoft JhengHei" panose="020B0604030504040204" pitchFamily="34" charset="-120"/>
+                <a:ea typeface="Microsoft JhengHei" panose="020B0604030504040204" pitchFamily="34" charset="-120"/>
+              </a:rPr>
+              <a:t> )</a:t>
+            </a:r>
+            <a:endParaRPr lang="vi-VN" sz="3200" b="1" dirty="0">
+              <a:solidFill>
+                <a:srgbClr val="000066"/>
+              </a:solidFill>
+              <a:ea typeface="Microsoft JhengHei" panose="020B0604030504040204" pitchFamily="34" charset="-120"/>
+            </a:endParaRPr>
+          </a:p>
+        </p:txBody>
+      </p:sp>
+    </p:spTree>
+    <p:extLst>
+      <p:ext uri="{BB962C8B-B14F-4D97-AF65-F5344CB8AC3E}">
+        <p14:creationId xmlns:p14="http://schemas.microsoft.com/office/powerpoint/2010/main" val="2673699882"/>
+      </p:ext>
+    </p:extLst>
+  </p:cSld>
+  <p:clrMapOvr>
+    <a:masterClrMapping/>
+  </p:clrMapOvr>
 </p:sld>
 </file>
 
